--- a/context/FRD-and-Dictionary-Input-Requirements.pptx
+++ b/context/FRD-and-Dictionary-Input-Requirements.pptx
@@ -582,7 +582,7 @@
           </a:p>
           <a:p>
             <a:r>
-              <a:t>prefix. DICT_X joins the same convention, into its own volume (dict_source), and</a:t>
+              <a:t>prefix. VDD_X joins the same convention, into its own volume (vdd_raw), and</a:t>
             </a:r>
           </a:p>
           <a:p>
@@ -899,37 +899,74 @@
           <a:p/>
           <a:p>
             <a:r>
-              <a:t>THE TARGET COLUMN NAME, MEASURED. Target = source reproduces an approved STTM</a:t>
-            </a:r>
-          </a:p>
-          <a:p>
-            <a:r>
-              <a:t>399/399 and ships today. Prefix + upper snake reproduces 22/115: "Member ID" -&gt;</a:t>
-            </a:r>
-          </a:p>
-          <a:p>
-            <a:r>
-              <a:t>TPL_MEME_ID, "Subscriber or Dependent indicator" -&gt; TPL_SBSB_IND. MEME/SBSB/GRP are</a:t>
-            </a:r>
-          </a:p>
-          <a:p>
-            <a:r>
-              <a:t>Facets column names - an existing warehouse vocabulary, not a transformation. The</a:t>
-            </a:r>
-          </a:p>
-          <a:p>
-            <a:r>
-              <a:t>agent infers the convention per feed by measuring candidates against the nearest</a:t>
-            </a:r>
-          </a:p>
-          <a:p>
-            <a:r>
-              <a:t>approved STTM and reporting the fit; what it cannot do is manufacture a vocabulary</a:t>
-            </a:r>
-          </a:p>
-          <a:p>
-            <a:r>
-              <a:t>nobody gave it. Those cells render blank and gated until it has one.</a:t>
+              <a:t>THE TARGET COLUMN NAME, MEASURED - and this is the one cell neither document</a:t>
+            </a:r>
+          </a:p>
+          <a:p>
+            <a:r>
+              <a:t>supplies. The agent decides from the FRD ALONE whether a feed renames: if the</a:t>
+            </a:r>
+          </a:p>
+          <a:p>
+            <a:r>
+              <a:t>sub-domain appears in the target table names, the columns carry it too. That holds</a:t>
+            </a:r>
+          </a:p>
+          <a:p>
+            <a:r>
+              <a:t>on both real feeds (CAQH renames 115/115, SD 4/411).</a:t>
+            </a:r>
+          </a:p>
+          <a:p/>
+          <a:p>
+            <a:r>
+              <a:t>What the reviewer then receives, on the renaming feed: 22 of 115 exact, 63 more</a:t>
+            </a:r>
+          </a:p>
+          <a:p>
+            <a:r>
+              <a:t>recognisable renames - so 85 of 115 (74%) are a NAME EDIT, not a rebuild. Mean</a:t>
+            </a:r>
+          </a:p>
+          <a:p>
+            <a:r>
+              <a:t>similarity 0.79. TPL_FILE_SEQUENCE_NUMBER -&gt; TPL_FILE_SEQ_NO is the shape of it;</a:t>
+            </a:r>
+          </a:p>
+          <a:p>
+            <a:r>
+              <a:t>the row, table, position and source field are already correct. One "miss",</a:t>
+            </a:r>
+          </a:p>
+          <a:p>
+            <a:r>
+              <a:t>TPL_DATA_SET_ID vs the approved TPL_DATE_SET_ID, is a typo in the client's own</a:t>
+            </a:r>
+          </a:p>
+          <a:p>
+            <a:r>
+              <a:t>workbook. On a feed that does not rename, the agent is at 388/391.</a:t>
+            </a:r>
+          </a:p>
+          <a:p/>
+          <a:p>
+            <a:r>
+              <a:t>Asking a model to GENERATE the name scored 0 of 115 - and marked 71 of those wrong</a:t>
+            </a:r>
+          </a:p>
+          <a:p>
+            <a:r>
+              <a:t>answers high confidence. Given a real catalog to match against it scored 95/101</a:t>
+            </a:r>
+          </a:p>
+          <a:p>
+            <a:r>
+              <a:t>with a high band right 92 of 92. So the missing input is not a document and not a</a:t>
+            </a:r>
+          </a:p>
+          <a:p>
+            <a:r>
+              <a:t>better prompt: it is read access to the existing warehouse columns.</a:t>
             </a:r>
           </a:p>
           <a:p/>
@@ -5649,7 +5686,7 @@
         <p:spPr>
           <a:xfrm>
             <a:off x="685800" y="4553712"/>
-            <a:ext cx="10820095" cy="713232"/>
+            <a:ext cx="10820095" cy="749808"/>
           </a:xfrm>
           <a:prstGeom prst="rect">
             <a:avLst/>
@@ -5691,7 +5728,7 @@
         <p:spPr>
           <a:xfrm>
             <a:off x="685800" y="4553712"/>
-            <a:ext cx="50292" cy="713232"/>
+            <a:ext cx="50292" cy="749808"/>
           </a:xfrm>
           <a:prstGeom prst="rect">
             <a:avLst/>
@@ -5767,8 +5804,8 @@
         </p:nvSpPr>
         <p:spPr>
           <a:xfrm>
-            <a:off x="978408" y="4882896"/>
-            <a:ext cx="10180015" cy="329184"/>
+            <a:off x="978408" y="4864608"/>
+            <a:ext cx="10180015" cy="402336"/>
           </a:xfrm>
           <a:prstGeom prst="rect">
             <a:avLst/>
@@ -5802,7 +5839,43 @@
                 </a:solidFill>
                 <a:latin typeface="Segoe UI"/>
               </a:rPr>
-              <a:t>  are transcribed into versioned contracts the agent ships with — layer, domain and load-strategy codes, catalog and schema per layer, type promotion — and hashed into every run. Nobody attaches them to a feed.</a:t>
+              <a:t>  are versioned contracts the agent ships with, hashed into every run. So is the </a:t>
+            </a:r>
+            <a:r>
+              <a:rPr sz="1000" b="1">
+                <a:solidFill>
+                  <a:srgbClr val="0A2458"/>
+                </a:solidFill>
+                <a:latin typeface="Segoe UI"/>
+              </a:rPr>
+              <a:t>term catalog</a:t>
+            </a:r>
+            <a:r>
+              <a:rPr sz="1000" b="0">
+                <a:solidFill>
+                  <a:srgbClr val="333F48"/>
+                </a:solidFill>
+                <a:latin typeface="Segoe UI"/>
+              </a:rPr>
+              <a:t> — the warehouse's own column vocabulary, harvested from approved STTMs when they sync. Nobody attaches either to a feed, and </a:t>
+            </a:r>
+            <a:r>
+              <a:rPr sz="1000" b="1">
+                <a:solidFill>
+                  <a:srgbClr val="D2202F"/>
+                </a:solidFill>
+                <a:latin typeface="Segoe UI"/>
+              </a:rPr>
+              <a:t>a run never opens an STTM</a:t>
+            </a:r>
+            <a:r>
+              <a:rPr sz="1000" b="0">
+                <a:solidFill>
+                  <a:srgbClr val="333F48"/>
+                </a:solidFill>
+                <a:latin typeface="Segoe UI"/>
+              </a:rPr>
+              <a:t>.</a:t>
             </a:r>
           </a:p>
         </p:txBody>
@@ -5969,7 +6042,7 @@
                 </a:solidFill>
                 <a:latin typeface="Consolas"/>
               </a:rPr>
-              <a:t>DICT_&lt;feed&gt;.xlsx</a:t>
+              <a:t>VDD_&lt;feed&gt;.xlsx</a:t>
             </a:r>
             <a:r>
               <a:rPr sz="1100" b="0">
@@ -6084,7 +6157,7 @@
                 </a:solidFill>
                 <a:latin typeface="Segoe UI"/>
               </a:rPr>
-              <a:t>docs/THREE_INPUT_ARCHITECTURE.md · the agent ingests DICT_ workbooks as of 2026-08-27</a:t>
+              <a:t>docs/THREE_INPUT_ARCHITECTURE.md · the agent ingests VDD_ workbooks as of 2026-08-27</a:t>
             </a:r>
           </a:p>
         </p:txBody>
@@ -8112,7 +8185,7 @@
                 </a:solidFill>
                 <a:latin typeface="Consolas"/>
               </a:rPr>
-              <a:t>Name the DICT_&lt;feed&gt;.xlsx here</a:t>
+              <a:t>Name the VDD_&lt;feed&gt;.xlsx here</a:t>
             </a:r>
           </a:p>
         </p:txBody>
@@ -8963,7 +9036,7 @@
         <p:spPr>
           <a:xfrm>
             <a:off x="685800" y="1901952"/>
-            <a:ext cx="5257800" cy="3474720"/>
+            <a:ext cx="5257800" cy="3566160"/>
           </a:xfrm>
           <a:prstGeom prst="rect">
             <a:avLst/>
@@ -9005,7 +9078,7 @@
         <p:spPr>
           <a:xfrm>
             <a:off x="685800" y="1901952"/>
-            <a:ext cx="50292" cy="3474720"/>
+            <a:ext cx="50292" cy="3566160"/>
           </a:xfrm>
           <a:prstGeom prst="rect">
             <a:avLst/>
@@ -9228,7 +9301,7 @@
         </p:nvSpPr>
         <p:spPr>
           <a:xfrm>
-            <a:off x="978408" y="2987344"/>
+            <a:off x="978408" y="2967227"/>
             <a:ext cx="64008" cy="64008"/>
           </a:xfrm>
           <a:prstGeom prst="rect">
@@ -9270,7 +9343,7 @@
         </p:nvSpPr>
         <p:spPr>
           <a:xfrm>
-            <a:off x="1143000" y="2909620"/>
+            <a:off x="1143000" y="2889503"/>
             <a:ext cx="1737360" cy="219456"/>
           </a:xfrm>
           <a:prstGeom prst="rect">
@@ -9305,7 +9378,7 @@
         </p:nvSpPr>
         <p:spPr>
           <a:xfrm>
-            <a:off x="2935224" y="2909620"/>
+            <a:off x="2935224" y="2889503"/>
             <a:ext cx="2715768" cy="219456"/>
           </a:xfrm>
           <a:prstGeom prst="rect">
@@ -9340,7 +9413,7 @@
         </p:nvSpPr>
         <p:spPr>
           <a:xfrm>
-            <a:off x="978408" y="3226917"/>
+            <a:off x="978408" y="3186684"/>
             <a:ext cx="64008" cy="64008"/>
           </a:xfrm>
           <a:prstGeom prst="rect">
@@ -9382,7 +9455,7 @@
         </p:nvSpPr>
         <p:spPr>
           <a:xfrm>
-            <a:off x="1143000" y="3149193"/>
+            <a:off x="1143000" y="3108960"/>
             <a:ext cx="1737360" cy="219456"/>
           </a:xfrm>
           <a:prstGeom prst="rect">
@@ -9417,7 +9490,7 @@
         </p:nvSpPr>
         <p:spPr>
           <a:xfrm>
-            <a:off x="2935224" y="3149193"/>
+            <a:off x="2935224" y="3108960"/>
             <a:ext cx="2715768" cy="219456"/>
           </a:xfrm>
           <a:prstGeom prst="rect">
@@ -9452,7 +9525,7 @@
         </p:nvSpPr>
         <p:spPr>
           <a:xfrm>
-            <a:off x="978408" y="3466490"/>
+            <a:off x="978408" y="3406140"/>
             <a:ext cx="64008" cy="64008"/>
           </a:xfrm>
           <a:prstGeom prst="rect">
@@ -9494,7 +9567,7 @@
         </p:nvSpPr>
         <p:spPr>
           <a:xfrm>
-            <a:off x="1143000" y="3388766"/>
+            <a:off x="1143000" y="3328416"/>
             <a:ext cx="1737360" cy="219456"/>
           </a:xfrm>
           <a:prstGeom prst="rect">
@@ -9529,7 +9602,7 @@
         </p:nvSpPr>
         <p:spPr>
           <a:xfrm>
-            <a:off x="2935224" y="3388766"/>
+            <a:off x="2935224" y="3328416"/>
             <a:ext cx="2715768" cy="219456"/>
           </a:xfrm>
           <a:prstGeom prst="rect">
@@ -9564,7 +9637,7 @@
         </p:nvSpPr>
         <p:spPr>
           <a:xfrm>
-            <a:off x="978408" y="3706063"/>
+            <a:off x="978408" y="3625596"/>
             <a:ext cx="64008" cy="64008"/>
           </a:xfrm>
           <a:prstGeom prst="rect">
@@ -9606,7 +9679,7 @@
         </p:nvSpPr>
         <p:spPr>
           <a:xfrm>
-            <a:off x="1143000" y="3628339"/>
+            <a:off x="1143000" y="3547872"/>
             <a:ext cx="1737360" cy="219456"/>
           </a:xfrm>
           <a:prstGeom prst="rect">
@@ -9641,7 +9714,7 @@
         </p:nvSpPr>
         <p:spPr>
           <a:xfrm>
-            <a:off x="2935224" y="3628339"/>
+            <a:off x="2935224" y="3547872"/>
             <a:ext cx="2715768" cy="219456"/>
           </a:xfrm>
           <a:prstGeom prst="rect">
@@ -9676,7 +9749,7 @@
         </p:nvSpPr>
         <p:spPr>
           <a:xfrm>
-            <a:off x="978408" y="3945636"/>
+            <a:off x="978408" y="3845052"/>
             <a:ext cx="64008" cy="64008"/>
           </a:xfrm>
           <a:prstGeom prst="rect">
@@ -9718,7 +9791,7 @@
         </p:nvSpPr>
         <p:spPr>
           <a:xfrm>
-            <a:off x="1143000" y="3867912"/>
+            <a:off x="1143000" y="3767328"/>
             <a:ext cx="1737360" cy="219456"/>
           </a:xfrm>
           <a:prstGeom prst="rect">
@@ -9753,7 +9826,7 @@
         </p:nvSpPr>
         <p:spPr>
           <a:xfrm>
-            <a:off x="2935224" y="3867912"/>
+            <a:off x="2935224" y="3767328"/>
             <a:ext cx="2715768" cy="219456"/>
           </a:xfrm>
           <a:prstGeom prst="rect">
@@ -9788,7 +9861,7 @@
         </p:nvSpPr>
         <p:spPr>
           <a:xfrm>
-            <a:off x="978408" y="4185208"/>
+            <a:off x="978408" y="4064508"/>
             <a:ext cx="64008" cy="64008"/>
           </a:xfrm>
           <a:prstGeom prst="rect">
@@ -9830,7 +9903,7 @@
         </p:nvSpPr>
         <p:spPr>
           <a:xfrm>
-            <a:off x="1143000" y="4107484"/>
+            <a:off x="1143000" y="3986784"/>
             <a:ext cx="1737360" cy="219456"/>
           </a:xfrm>
           <a:prstGeom prst="rect">
@@ -9865,7 +9938,7 @@
         </p:nvSpPr>
         <p:spPr>
           <a:xfrm>
-            <a:off x="2935224" y="4107484"/>
+            <a:off x="2935224" y="3986784"/>
             <a:ext cx="2715768" cy="219456"/>
           </a:xfrm>
           <a:prstGeom prst="rect">
@@ -9900,7 +9973,7 @@
         </p:nvSpPr>
         <p:spPr>
           <a:xfrm>
-            <a:off x="978408" y="4424781"/>
+            <a:off x="978408" y="4283964"/>
             <a:ext cx="64008" cy="64008"/>
           </a:xfrm>
           <a:prstGeom prst="rect">
@@ -9942,7 +10015,7 @@
         </p:nvSpPr>
         <p:spPr>
           <a:xfrm>
-            <a:off x="1143000" y="4347057"/>
+            <a:off x="1143000" y="4206240"/>
             <a:ext cx="1737360" cy="219456"/>
           </a:xfrm>
           <a:prstGeom prst="rect">
@@ -9977,7 +10050,7 @@
         </p:nvSpPr>
         <p:spPr>
           <a:xfrm>
-            <a:off x="2935224" y="4347057"/>
+            <a:off x="2935224" y="4206240"/>
             <a:ext cx="2715768" cy="219456"/>
           </a:xfrm>
           <a:prstGeom prst="rect">
@@ -10012,7 +10085,7 @@
         </p:nvSpPr>
         <p:spPr>
           <a:xfrm>
-            <a:off x="978408" y="4664354"/>
+            <a:off x="978408" y="4503420"/>
             <a:ext cx="64008" cy="64008"/>
           </a:xfrm>
           <a:prstGeom prst="rect">
@@ -10054,7 +10127,7 @@
         </p:nvSpPr>
         <p:spPr>
           <a:xfrm>
-            <a:off x="1143000" y="4586630"/>
+            <a:off x="1143000" y="4425696"/>
             <a:ext cx="1737360" cy="219456"/>
           </a:xfrm>
           <a:prstGeom prst="rect">
@@ -10089,7 +10162,7 @@
         </p:nvSpPr>
         <p:spPr>
           <a:xfrm>
-            <a:off x="2935224" y="4586630"/>
+            <a:off x="2935224" y="4425696"/>
             <a:ext cx="2715768" cy="219456"/>
           </a:xfrm>
           <a:prstGeom prst="rect">
@@ -10112,19 +10185,131 @@
                 <a:latin typeface="Segoe UI"/>
               </a:rPr>
               <a:t>the tab holding this file's columns</a:t>
+            </a:r>
+          </a:p>
+        </p:txBody>
+      </p:sp>
+      <p:sp>
+        <p:nvSpPr>
+          <p:cNvPr id="39" name="Rectangle 38"/>
+          <p:cNvSpPr/>
+          <p:nvPr/>
+        </p:nvSpPr>
+        <p:spPr>
+          <a:xfrm>
+            <a:off x="978408" y="4722876"/>
+            <a:ext cx="64008" cy="64008"/>
+          </a:xfrm>
+          <a:prstGeom prst="rect">
+            <a:avLst/>
+          </a:prstGeom>
+          <a:solidFill>
+            <a:srgbClr val="003DA5"/>
+          </a:solidFill>
+          <a:ln>
+            <a:noFill/>
+          </a:ln>
+          <a:effectLst/>
+        </p:spPr>
+        <p:style>
+          <a:lnRef idx="1">
+            <a:schemeClr val="accent1"/>
+          </a:lnRef>
+          <a:fillRef idx="3">
+            <a:schemeClr val="accent1"/>
+          </a:fillRef>
+          <a:effectRef idx="2">
+            <a:schemeClr val="accent1"/>
+          </a:effectRef>
+          <a:fontRef idx="minor">
+            <a:schemeClr val="lt1"/>
+          </a:fontRef>
+        </p:style>
+        <p:txBody>
+          <a:bodyPr rtlCol="0" anchor="ctr"/>
+          <a:lstStyle/>
+          <a:p/>
+        </p:txBody>
+      </p:sp>
+      <p:sp>
+        <p:nvSpPr>
+          <p:cNvPr id="40" name="TextBox 39"/>
+          <p:cNvSpPr txBox="1"/>
+          <p:nvPr/>
+        </p:nvSpPr>
+        <p:spPr>
+          <a:xfrm>
+            <a:off x="1143000" y="4645152"/>
+            <a:ext cx="1737360" cy="219456"/>
+          </a:xfrm>
+          <a:prstGeom prst="rect">
+            <a:avLst/>
+          </a:prstGeom>
+          <a:noFill/>
+        </p:spPr>
+        <p:txBody>
+          <a:bodyPr wrap="square" lIns="0" rIns="0" tIns="0" bIns="0" anchor="t">
+            <a:spAutoFit/>
+          </a:bodyPr>
+          <a:lstStyle/>
+          <a:p>
+            <a:pPr algn="l"/>
+            <a:r>
+              <a:rPr sz="900" b="1">
+                <a:solidFill>
+                  <a:srgbClr val="0A2458"/>
+                </a:solidFill>
+                <a:latin typeface="Consolas"/>
+              </a:rPr>
+              <a:t>Null Representation</a:t>
+            </a:r>
+          </a:p>
+        </p:txBody>
+      </p:sp>
+      <p:sp>
+        <p:nvSpPr>
+          <p:cNvPr id="41" name="TextBox 40"/>
+          <p:cNvSpPr txBox="1"/>
+          <p:nvPr/>
+        </p:nvSpPr>
+        <p:spPr>
+          <a:xfrm>
+            <a:off x="2935224" y="4645152"/>
+            <a:ext cx="2715768" cy="219456"/>
+          </a:xfrm>
+          <a:prstGeom prst="rect">
+            <a:avLst/>
+          </a:prstGeom>
+          <a:noFill/>
+        </p:spPr>
+        <p:txBody>
+          <a:bodyPr wrap="square" lIns="0" rIns="0" tIns="0" bIns="0" anchor="t">
+            <a:spAutoFit/>
+          </a:bodyPr>
+          <a:lstStyle/>
+          <a:p>
+            <a:pPr algn="l"/>
+            <a:r>
+              <a:rPr sz="880" b="0">
+                <a:solidFill>
+                  <a:srgbClr val="333F48"/>
+                </a:solidFill>
+                <a:latin typeface="Segoe UI"/>
+              </a:rPr>
+              <a:t>what a MISSING value looks like in the file</a:t>
             </a:r>
           </a:p>
         </p:txBody>
       </p:sp>
       <p:cxnSp>
         <p:nvCxnSpPr>
-          <p:cNvPr id="39" name="Connector 38"/>
+          <p:cNvPr id="42" name="Connector 41"/>
           <p:cNvCxnSpPr/>
           <p:nvPr/>
         </p:nvCxnSpPr>
         <p:spPr>
           <a:xfrm>
-            <a:off x="978408" y="5029200"/>
+            <a:off x="978408" y="5102352"/>
             <a:ext cx="4709160" cy="0"/>
           </a:xfrm>
           <a:prstGeom prst="line">
@@ -10153,13 +10338,13 @@
       </p:cxnSp>
       <p:sp>
         <p:nvSpPr>
-          <p:cNvPr id="40" name="TextBox 39"/>
-          <p:cNvSpPr txBox="1"/>
-          <p:nvPr/>
-        </p:nvSpPr>
-        <p:spPr>
-          <a:xfrm>
-            <a:off x="978408" y="5102352"/>
+          <p:cNvPr id="43" name="TextBox 42"/>
+          <p:cNvSpPr txBox="1"/>
+          <p:nvPr/>
+        </p:nvSpPr>
+        <p:spPr>
+          <a:xfrm>
+            <a:off x="978408" y="5175504"/>
             <a:ext cx="4690872" cy="256032"/>
           </a:xfrm>
           <a:prstGeom prst="rect">
@@ -10197,14 +10382,14 @@
       </p:sp>
       <p:sp>
         <p:nvSpPr>
-          <p:cNvPr id="41" name="Rectangle 40"/>
+          <p:cNvPr id="44" name="Rectangle 43"/>
           <p:cNvSpPr/>
           <p:nvPr/>
         </p:nvSpPr>
         <p:spPr>
           <a:xfrm>
             <a:off x="6245352" y="1901952"/>
-            <a:ext cx="5257800" cy="3474720"/>
+            <a:ext cx="5257800" cy="3566160"/>
           </a:xfrm>
           <a:prstGeom prst="rect">
             <a:avLst/>
@@ -10239,14 +10424,14 @@
       </p:sp>
       <p:sp>
         <p:nvSpPr>
-          <p:cNvPr id="42" name="Rectangle 41"/>
+          <p:cNvPr id="45" name="Rectangle 44"/>
           <p:cNvSpPr/>
           <p:nvPr/>
         </p:nvSpPr>
         <p:spPr>
           <a:xfrm>
             <a:off x="6245352" y="1901952"/>
-            <a:ext cx="50292" cy="3474720"/>
+            <a:ext cx="50292" cy="3566160"/>
           </a:xfrm>
           <a:prstGeom prst="rect">
             <a:avLst/>
@@ -10281,7 +10466,7 @@
       </p:sp>
       <p:sp>
         <p:nvSpPr>
-          <p:cNvPr id="43" name="TextBox 42"/>
+          <p:cNvPr id="46" name="TextBox 45"/>
           <p:cNvSpPr txBox="1"/>
           <p:nvPr/>
         </p:nvSpPr>
@@ -10316,7 +10501,7 @@
       </p:sp>
       <p:sp>
         <p:nvSpPr>
-          <p:cNvPr id="44" name="TextBox 43"/>
+          <p:cNvPr id="47" name="TextBox 46"/>
           <p:cNvSpPr txBox="1"/>
           <p:nvPr/>
         </p:nvSpPr>
@@ -10351,7 +10536,7 @@
       </p:sp>
       <p:sp>
         <p:nvSpPr>
-          <p:cNvPr id="45" name="Rectangle 44"/>
+          <p:cNvPr id="48" name="Rectangle 47"/>
           <p:cNvSpPr/>
           <p:nvPr/>
         </p:nvSpPr>
@@ -10393,7 +10578,7 @@
       </p:sp>
       <p:sp>
         <p:nvSpPr>
-          <p:cNvPr id="46" name="TextBox 45"/>
+          <p:cNvPr id="49" name="TextBox 48"/>
           <p:cNvSpPr txBox="1"/>
           <p:nvPr/>
         </p:nvSpPr>
@@ -10428,7 +10613,7 @@
       </p:sp>
       <p:sp>
         <p:nvSpPr>
-          <p:cNvPr id="47" name="TextBox 46"/>
+          <p:cNvPr id="50" name="TextBox 49"/>
           <p:cNvSpPr txBox="1"/>
           <p:nvPr/>
         </p:nvSpPr>
@@ -10463,13 +10648,13 @@
       </p:sp>
       <p:sp>
         <p:nvSpPr>
-          <p:cNvPr id="48" name="Rectangle 47"/>
+          <p:cNvPr id="51" name="Rectangle 50"/>
           <p:cNvSpPr/>
           <p:nvPr/>
         </p:nvSpPr>
         <p:spPr>
           <a:xfrm>
-            <a:off x="6537960" y="2987344"/>
+            <a:off x="6537960" y="2967227"/>
             <a:ext cx="64008" cy="64008"/>
           </a:xfrm>
           <a:prstGeom prst="rect">
@@ -10505,13 +10690,13 @@
       </p:sp>
       <p:sp>
         <p:nvSpPr>
-          <p:cNvPr id="49" name="TextBox 48"/>
-          <p:cNvSpPr txBox="1"/>
-          <p:nvPr/>
-        </p:nvSpPr>
-        <p:spPr>
-          <a:xfrm>
-            <a:off x="6702552" y="2909620"/>
+          <p:cNvPr id="52" name="TextBox 51"/>
+          <p:cNvSpPr txBox="1"/>
+          <p:nvPr/>
+        </p:nvSpPr>
+        <p:spPr>
+          <a:xfrm>
+            <a:off x="6702552" y="2889503"/>
             <a:ext cx="1773936" cy="219456"/>
           </a:xfrm>
           <a:prstGeom prst="rect">
@@ -10540,13 +10725,13 @@
       </p:sp>
       <p:sp>
         <p:nvSpPr>
-          <p:cNvPr id="50" name="TextBox 49"/>
-          <p:cNvSpPr txBox="1"/>
-          <p:nvPr/>
-        </p:nvSpPr>
-        <p:spPr>
-          <a:xfrm>
-            <a:off x="8531352" y="2909620"/>
+          <p:cNvPr id="53" name="TextBox 52"/>
+          <p:cNvSpPr txBox="1"/>
+          <p:nvPr/>
+        </p:nvSpPr>
+        <p:spPr>
+          <a:xfrm>
+            <a:off x="8531352" y="2889503"/>
             <a:ext cx="2679192" cy="219456"/>
           </a:xfrm>
           <a:prstGeom prst="rect">
@@ -10575,13 +10760,13 @@
       </p:sp>
       <p:sp>
         <p:nvSpPr>
-          <p:cNvPr id="51" name="Rectangle 50"/>
+          <p:cNvPr id="54" name="Rectangle 53"/>
           <p:cNvSpPr/>
           <p:nvPr/>
         </p:nvSpPr>
         <p:spPr>
           <a:xfrm>
-            <a:off x="6537960" y="3226917"/>
+            <a:off x="6537960" y="3186684"/>
             <a:ext cx="64008" cy="64008"/>
           </a:xfrm>
           <a:prstGeom prst="rect">
@@ -10617,13 +10802,13 @@
       </p:sp>
       <p:sp>
         <p:nvSpPr>
-          <p:cNvPr id="52" name="TextBox 51"/>
-          <p:cNvSpPr txBox="1"/>
-          <p:nvPr/>
-        </p:nvSpPr>
-        <p:spPr>
-          <a:xfrm>
-            <a:off x="6702552" y="3149193"/>
+          <p:cNvPr id="55" name="TextBox 54"/>
+          <p:cNvSpPr txBox="1"/>
+          <p:nvPr/>
+        </p:nvSpPr>
+        <p:spPr>
+          <a:xfrm>
+            <a:off x="6702552" y="3108960"/>
             <a:ext cx="1773936" cy="219456"/>
           </a:xfrm>
           <a:prstGeom prst="rect">
@@ -10652,13 +10837,13 @@
       </p:sp>
       <p:sp>
         <p:nvSpPr>
-          <p:cNvPr id="53" name="TextBox 52"/>
-          <p:cNvSpPr txBox="1"/>
-          <p:nvPr/>
-        </p:nvSpPr>
-        <p:spPr>
-          <a:xfrm>
-            <a:off x="8531352" y="3149193"/>
+          <p:cNvPr id="56" name="TextBox 55"/>
+          <p:cNvSpPr txBox="1"/>
+          <p:nvPr/>
+        </p:nvSpPr>
+        <p:spPr>
+          <a:xfrm>
+            <a:off x="8531352" y="3108960"/>
             <a:ext cx="2679192" cy="219456"/>
           </a:xfrm>
           <a:prstGeom prst="rect">
@@ -10687,13 +10872,13 @@
       </p:sp>
       <p:sp>
         <p:nvSpPr>
-          <p:cNvPr id="54" name="Rectangle 53"/>
+          <p:cNvPr id="57" name="Rectangle 56"/>
           <p:cNvSpPr/>
           <p:nvPr/>
         </p:nvSpPr>
         <p:spPr>
           <a:xfrm>
-            <a:off x="6537960" y="3466490"/>
+            <a:off x="6537960" y="3406140"/>
             <a:ext cx="64008" cy="64008"/>
           </a:xfrm>
           <a:prstGeom prst="rect">
@@ -10729,13 +10914,13 @@
       </p:sp>
       <p:sp>
         <p:nvSpPr>
-          <p:cNvPr id="55" name="TextBox 54"/>
-          <p:cNvSpPr txBox="1"/>
-          <p:nvPr/>
-        </p:nvSpPr>
-        <p:spPr>
-          <a:xfrm>
-            <a:off x="6702552" y="3388766"/>
+          <p:cNvPr id="58" name="TextBox 57"/>
+          <p:cNvSpPr txBox="1"/>
+          <p:nvPr/>
+        </p:nvSpPr>
+        <p:spPr>
+          <a:xfrm>
+            <a:off x="6702552" y="3328416"/>
             <a:ext cx="1773936" cy="219456"/>
           </a:xfrm>
           <a:prstGeom prst="rect">
@@ -10764,13 +10949,13 @@
       </p:sp>
       <p:sp>
         <p:nvSpPr>
-          <p:cNvPr id="56" name="TextBox 55"/>
-          <p:cNvSpPr txBox="1"/>
-          <p:nvPr/>
-        </p:nvSpPr>
-        <p:spPr>
-          <a:xfrm>
-            <a:off x="8531352" y="3388766"/>
+          <p:cNvPr id="59" name="TextBox 58"/>
+          <p:cNvSpPr txBox="1"/>
+          <p:nvPr/>
+        </p:nvSpPr>
+        <p:spPr>
+          <a:xfrm>
+            <a:off x="8531352" y="3328416"/>
             <a:ext cx="2679192" cy="219456"/>
           </a:xfrm>
           <a:prstGeom prst="rect">
@@ -10799,13 +10984,13 @@
       </p:sp>
       <p:sp>
         <p:nvSpPr>
-          <p:cNvPr id="57" name="Rectangle 56"/>
+          <p:cNvPr id="60" name="Rectangle 59"/>
           <p:cNvSpPr/>
           <p:nvPr/>
         </p:nvSpPr>
         <p:spPr>
           <a:xfrm>
-            <a:off x="6537960" y="3706063"/>
+            <a:off x="6537960" y="3625596"/>
             <a:ext cx="64008" cy="64008"/>
           </a:xfrm>
           <a:prstGeom prst="rect">
@@ -10841,13 +11026,13 @@
       </p:sp>
       <p:sp>
         <p:nvSpPr>
-          <p:cNvPr id="58" name="TextBox 57"/>
-          <p:cNvSpPr txBox="1"/>
-          <p:nvPr/>
-        </p:nvSpPr>
-        <p:spPr>
-          <a:xfrm>
-            <a:off x="6702552" y="3628339"/>
+          <p:cNvPr id="61" name="TextBox 60"/>
+          <p:cNvSpPr txBox="1"/>
+          <p:nvPr/>
+        </p:nvSpPr>
+        <p:spPr>
+          <a:xfrm>
+            <a:off x="6702552" y="3547872"/>
             <a:ext cx="1773936" cy="219456"/>
           </a:xfrm>
           <a:prstGeom prst="rect">
@@ -10876,13 +11061,13 @@
       </p:sp>
       <p:sp>
         <p:nvSpPr>
-          <p:cNvPr id="59" name="TextBox 58"/>
-          <p:cNvSpPr txBox="1"/>
-          <p:nvPr/>
-        </p:nvSpPr>
-        <p:spPr>
-          <a:xfrm>
-            <a:off x="8531352" y="3628339"/>
+          <p:cNvPr id="62" name="TextBox 61"/>
+          <p:cNvSpPr txBox="1"/>
+          <p:nvPr/>
+        </p:nvSpPr>
+        <p:spPr>
+          <a:xfrm>
+            <a:off x="8531352" y="3547872"/>
             <a:ext cx="2679192" cy="219456"/>
           </a:xfrm>
           <a:prstGeom prst="rect">
@@ -10911,13 +11096,13 @@
       </p:sp>
       <p:sp>
         <p:nvSpPr>
-          <p:cNvPr id="60" name="Rectangle 59"/>
+          <p:cNvPr id="63" name="Rectangle 62"/>
           <p:cNvSpPr/>
           <p:nvPr/>
         </p:nvSpPr>
         <p:spPr>
           <a:xfrm>
-            <a:off x="6537960" y="3945636"/>
+            <a:off x="6537960" y="3845052"/>
             <a:ext cx="64008" cy="64008"/>
           </a:xfrm>
           <a:prstGeom prst="rect">
@@ -10953,13 +11138,13 @@
       </p:sp>
       <p:sp>
         <p:nvSpPr>
-          <p:cNvPr id="61" name="TextBox 60"/>
-          <p:cNvSpPr txBox="1"/>
-          <p:nvPr/>
-        </p:nvSpPr>
-        <p:spPr>
-          <a:xfrm>
-            <a:off x="6702552" y="3867912"/>
+          <p:cNvPr id="64" name="TextBox 63"/>
+          <p:cNvSpPr txBox="1"/>
+          <p:nvPr/>
+        </p:nvSpPr>
+        <p:spPr>
+          <a:xfrm>
+            <a:off x="6702552" y="3767328"/>
             <a:ext cx="1773936" cy="219456"/>
           </a:xfrm>
           <a:prstGeom prst="rect">
@@ -10988,13 +11173,13 @@
       </p:sp>
       <p:sp>
         <p:nvSpPr>
-          <p:cNvPr id="62" name="TextBox 61"/>
-          <p:cNvSpPr txBox="1"/>
-          <p:nvPr/>
-        </p:nvSpPr>
-        <p:spPr>
-          <a:xfrm>
-            <a:off x="8531352" y="3867912"/>
+          <p:cNvPr id="65" name="TextBox 64"/>
+          <p:cNvSpPr txBox="1"/>
+          <p:nvPr/>
+        </p:nvSpPr>
+        <p:spPr>
+          <a:xfrm>
+            <a:off x="8531352" y="3767328"/>
             <a:ext cx="2679192" cy="219456"/>
           </a:xfrm>
           <a:prstGeom prst="rect">
@@ -11023,13 +11208,13 @@
       </p:sp>
       <p:sp>
         <p:nvSpPr>
-          <p:cNvPr id="63" name="Rectangle 62"/>
+          <p:cNvPr id="66" name="Rectangle 65"/>
           <p:cNvSpPr/>
           <p:nvPr/>
         </p:nvSpPr>
         <p:spPr>
           <a:xfrm>
-            <a:off x="6537960" y="4185208"/>
+            <a:off x="6537960" y="4064508"/>
             <a:ext cx="64008" cy="64008"/>
           </a:xfrm>
           <a:prstGeom prst="rect">
@@ -11065,13 +11250,13 @@
       </p:sp>
       <p:sp>
         <p:nvSpPr>
-          <p:cNvPr id="64" name="TextBox 63"/>
-          <p:cNvSpPr txBox="1"/>
-          <p:nvPr/>
-        </p:nvSpPr>
-        <p:spPr>
-          <a:xfrm>
-            <a:off x="6702552" y="4107484"/>
+          <p:cNvPr id="67" name="TextBox 66"/>
+          <p:cNvSpPr txBox="1"/>
+          <p:nvPr/>
+        </p:nvSpPr>
+        <p:spPr>
+          <a:xfrm>
+            <a:off x="6702552" y="3986784"/>
             <a:ext cx="1773936" cy="219456"/>
           </a:xfrm>
           <a:prstGeom prst="rect">
@@ -11100,13 +11285,13 @@
       </p:sp>
       <p:sp>
         <p:nvSpPr>
-          <p:cNvPr id="65" name="TextBox 64"/>
-          <p:cNvSpPr txBox="1"/>
-          <p:nvPr/>
-        </p:nvSpPr>
-        <p:spPr>
-          <a:xfrm>
-            <a:off x="8531352" y="4107484"/>
+          <p:cNvPr id="68" name="TextBox 67"/>
+          <p:cNvSpPr txBox="1"/>
+          <p:nvPr/>
+        </p:nvSpPr>
+        <p:spPr>
+          <a:xfrm>
+            <a:off x="8531352" y="3986784"/>
             <a:ext cx="2679192" cy="219456"/>
           </a:xfrm>
           <a:prstGeom prst="rect">
@@ -11135,13 +11320,13 @@
       </p:sp>
       <p:sp>
         <p:nvSpPr>
-          <p:cNvPr id="66" name="Rectangle 65"/>
+          <p:cNvPr id="69" name="Rectangle 68"/>
           <p:cNvSpPr/>
           <p:nvPr/>
         </p:nvSpPr>
         <p:spPr>
           <a:xfrm>
-            <a:off x="6537960" y="4424781"/>
+            <a:off x="6537960" y="4283964"/>
             <a:ext cx="64008" cy="64008"/>
           </a:xfrm>
           <a:prstGeom prst="rect">
@@ -11177,13 +11362,13 @@
       </p:sp>
       <p:sp>
         <p:nvSpPr>
-          <p:cNvPr id="67" name="TextBox 66"/>
-          <p:cNvSpPr txBox="1"/>
-          <p:nvPr/>
-        </p:nvSpPr>
-        <p:spPr>
-          <a:xfrm>
-            <a:off x="6702552" y="4347057"/>
+          <p:cNvPr id="70" name="TextBox 69"/>
+          <p:cNvSpPr txBox="1"/>
+          <p:nvPr/>
+        </p:nvSpPr>
+        <p:spPr>
+          <a:xfrm>
+            <a:off x="6702552" y="4206240"/>
             <a:ext cx="1773936" cy="219456"/>
           </a:xfrm>
           <a:prstGeom prst="rect">
@@ -11212,13 +11397,13 @@
       </p:sp>
       <p:sp>
         <p:nvSpPr>
-          <p:cNvPr id="68" name="TextBox 67"/>
-          <p:cNvSpPr txBox="1"/>
-          <p:nvPr/>
-        </p:nvSpPr>
-        <p:spPr>
-          <a:xfrm>
-            <a:off x="8531352" y="4347057"/>
+          <p:cNvPr id="71" name="TextBox 70"/>
+          <p:cNvSpPr txBox="1"/>
+          <p:nvPr/>
+        </p:nvSpPr>
+        <p:spPr>
+          <a:xfrm>
+            <a:off x="8531352" y="4206240"/>
             <a:ext cx="2679192" cy="219456"/>
           </a:xfrm>
           <a:prstGeom prst="rect">
@@ -11247,13 +11432,13 @@
       </p:sp>
       <p:sp>
         <p:nvSpPr>
-          <p:cNvPr id="69" name="Rectangle 68"/>
+          <p:cNvPr id="72" name="Rectangle 71"/>
           <p:cNvSpPr/>
           <p:nvPr/>
         </p:nvSpPr>
         <p:spPr>
           <a:xfrm>
-            <a:off x="6537960" y="4664354"/>
+            <a:off x="6537960" y="4503420"/>
             <a:ext cx="64008" cy="64008"/>
           </a:xfrm>
           <a:prstGeom prst="rect">
@@ -11289,13 +11474,13 @@
       </p:sp>
       <p:sp>
         <p:nvSpPr>
-          <p:cNvPr id="70" name="TextBox 69"/>
-          <p:cNvSpPr txBox="1"/>
-          <p:nvPr/>
-        </p:nvSpPr>
-        <p:spPr>
-          <a:xfrm>
-            <a:off x="6702552" y="4586630"/>
+          <p:cNvPr id="73" name="TextBox 72"/>
+          <p:cNvSpPr txBox="1"/>
+          <p:nvPr/>
+        </p:nvSpPr>
+        <p:spPr>
+          <a:xfrm>
+            <a:off x="6702552" y="4425696"/>
             <a:ext cx="1773936" cy="219456"/>
           </a:xfrm>
           <a:prstGeom prst="rect">
@@ -11324,13 +11509,13 @@
       </p:sp>
       <p:sp>
         <p:nvSpPr>
-          <p:cNvPr id="71" name="TextBox 70"/>
-          <p:cNvSpPr txBox="1"/>
-          <p:nvPr/>
-        </p:nvSpPr>
-        <p:spPr>
-          <a:xfrm>
-            <a:off x="8531352" y="4586630"/>
+          <p:cNvPr id="74" name="TextBox 73"/>
+          <p:cNvSpPr txBox="1"/>
+          <p:nvPr/>
+        </p:nvSpPr>
+        <p:spPr>
+          <a:xfrm>
+            <a:off x="8531352" y="4425696"/>
             <a:ext cx="2679192" cy="219456"/>
           </a:xfrm>
           <a:prstGeom prst="rect">
@@ -11359,13 +11544,125 @@
       </p:sp>
       <p:sp>
         <p:nvSpPr>
-          <p:cNvPr id="72" name="Rectangle 71"/>
+          <p:cNvPr id="75" name="Rectangle 74"/>
           <p:cNvSpPr/>
           <p:nvPr/>
         </p:nvSpPr>
         <p:spPr>
           <a:xfrm>
-            <a:off x="6537960" y="4903927"/>
+            <a:off x="6537960" y="4722876"/>
+            <a:ext cx="64008" cy="64008"/>
+          </a:xfrm>
+          <a:prstGeom prst="rect">
+            <a:avLst/>
+          </a:prstGeom>
+          <a:solidFill>
+            <a:srgbClr val="D2202F"/>
+          </a:solidFill>
+          <a:ln>
+            <a:noFill/>
+          </a:ln>
+          <a:effectLst/>
+        </p:spPr>
+        <p:style>
+          <a:lnRef idx="1">
+            <a:schemeClr val="accent1"/>
+          </a:lnRef>
+          <a:fillRef idx="3">
+            <a:schemeClr val="accent1"/>
+          </a:fillRef>
+          <a:effectRef idx="2">
+            <a:schemeClr val="accent1"/>
+          </a:effectRef>
+          <a:fontRef idx="minor">
+            <a:schemeClr val="lt1"/>
+          </a:fontRef>
+        </p:style>
+        <p:txBody>
+          <a:bodyPr rtlCol="0" anchor="ctr"/>
+          <a:lstStyle/>
+          <a:p/>
+        </p:txBody>
+      </p:sp>
+      <p:sp>
+        <p:nvSpPr>
+          <p:cNvPr id="76" name="TextBox 75"/>
+          <p:cNvSpPr txBox="1"/>
+          <p:nvPr/>
+        </p:nvSpPr>
+        <p:spPr>
+          <a:xfrm>
+            <a:off x="6702552" y="4645152"/>
+            <a:ext cx="1773936" cy="219456"/>
+          </a:xfrm>
+          <a:prstGeom prst="rect">
+            <a:avLst/>
+          </a:prstGeom>
+          <a:noFill/>
+        </p:spPr>
+        <p:txBody>
+          <a:bodyPr wrap="square" lIns="0" rIns="0" tIns="0" bIns="0" anchor="t">
+            <a:spAutoFit/>
+          </a:bodyPr>
+          <a:lstStyle/>
+          <a:p>
+            <a:pPr algn="l"/>
+            <a:r>
+              <a:rPr sz="900" b="1">
+                <a:solidFill>
+                  <a:srgbClr val="0A2458"/>
+                </a:solidFill>
+                <a:latin typeface="Consolas"/>
+              </a:rPr>
+              <a:t>Key / Uniqueness</a:t>
+            </a:r>
+          </a:p>
+        </p:txBody>
+      </p:sp>
+      <p:sp>
+        <p:nvSpPr>
+          <p:cNvPr id="77" name="TextBox 76"/>
+          <p:cNvSpPr txBox="1"/>
+          <p:nvPr/>
+        </p:nvSpPr>
+        <p:spPr>
+          <a:xfrm>
+            <a:off x="8531352" y="4645152"/>
+            <a:ext cx="2679192" cy="219456"/>
+          </a:xfrm>
+          <a:prstGeom prst="rect">
+            <a:avLst/>
+          </a:prstGeom>
+          <a:noFill/>
+        </p:spPr>
+        <p:txBody>
+          <a:bodyPr wrap="square" lIns="0" rIns="0" tIns="0" bIns="0" anchor="t">
+            <a:spAutoFit/>
+          </a:bodyPr>
+          <a:lstStyle/>
+          <a:p>
+            <a:pPr algn="l"/>
+            <a:r>
+              <a:rPr sz="860" b="1">
+                <a:solidFill>
+                  <a:srgbClr val="D2202F"/>
+                </a:solidFill>
+                <a:latin typeface="Segoe UI"/>
+              </a:rPr>
+              <a:t>never — the match key an Upsert needs</a:t>
+            </a:r>
+          </a:p>
+        </p:txBody>
+      </p:sp>
+      <p:sp>
+        <p:nvSpPr>
+          <p:cNvPr id="78" name="Rectangle 77"/>
+          <p:cNvSpPr/>
+          <p:nvPr/>
+        </p:nvSpPr>
+        <p:spPr>
+          <a:xfrm>
+            <a:off x="6537960" y="4942332"/>
             <a:ext cx="64008" cy="64008"/>
           </a:xfrm>
           <a:prstGeom prst="rect">
@@ -11401,13 +11698,13 @@
       </p:sp>
       <p:sp>
         <p:nvSpPr>
-          <p:cNvPr id="73" name="TextBox 72"/>
-          <p:cNvSpPr txBox="1"/>
-          <p:nvPr/>
-        </p:nvSpPr>
-        <p:spPr>
-          <a:xfrm>
-            <a:off x="6702552" y="4826203"/>
+          <p:cNvPr id="79" name="TextBox 78"/>
+          <p:cNvSpPr txBox="1"/>
+          <p:nvPr/>
+        </p:nvSpPr>
+        <p:spPr>
+          <a:xfrm>
+            <a:off x="6702552" y="4864608"/>
             <a:ext cx="1773936" cy="219456"/>
           </a:xfrm>
           <a:prstGeom prst="rect">
@@ -11436,13 +11733,13 @@
       </p:sp>
       <p:sp>
         <p:nvSpPr>
-          <p:cNvPr id="74" name="TextBox 73"/>
-          <p:cNvSpPr txBox="1"/>
-          <p:nvPr/>
-        </p:nvSpPr>
-        <p:spPr>
-          <a:xfrm>
-            <a:off x="8531352" y="4826203"/>
+          <p:cNvPr id="80" name="TextBox 79"/>
+          <p:cNvSpPr txBox="1"/>
+          <p:nvPr/>
+        </p:nvSpPr>
+        <p:spPr>
+          <a:xfrm>
+            <a:off x="8531352" y="4864608"/>
             <a:ext cx="2679192" cy="219456"/>
           </a:xfrm>
           <a:prstGeom prst="rect">
@@ -11471,13 +11768,13 @@
       </p:sp>
       <p:cxnSp>
         <p:nvCxnSpPr>
-          <p:cNvPr id="75" name="Connector 74"/>
+          <p:cNvPr id="81" name="Connector 80"/>
           <p:cNvCxnSpPr/>
           <p:nvPr/>
         </p:nvCxnSpPr>
         <p:spPr>
           <a:xfrm>
-            <a:off x="6537960" y="5029200"/>
+            <a:off x="6537960" y="5102352"/>
             <a:ext cx="4709160" cy="0"/>
           </a:xfrm>
           <a:prstGeom prst="line">
@@ -11506,13 +11803,13 @@
       </p:cxnSp>
       <p:sp>
         <p:nvSpPr>
-          <p:cNvPr id="76" name="TextBox 75"/>
-          <p:cNvSpPr txBox="1"/>
-          <p:nvPr/>
-        </p:nvSpPr>
-        <p:spPr>
-          <a:xfrm>
-            <a:off x="6537960" y="5102352"/>
+          <p:cNvPr id="82" name="TextBox 81"/>
+          <p:cNvSpPr txBox="1"/>
+          <p:nvPr/>
+        </p:nvSpPr>
+        <p:spPr>
+          <a:xfrm>
+            <a:off x="6537960" y="5175504"/>
             <a:ext cx="4690872" cy="219456"/>
           </a:xfrm>
           <a:prstGeom prst="rect">
@@ -11541,14 +11838,14 @@
       </p:sp>
       <p:sp>
         <p:nvSpPr>
-          <p:cNvPr id="77" name="Rectangle 76"/>
+          <p:cNvPr id="83" name="Rectangle 82"/>
           <p:cNvSpPr/>
           <p:nvPr/>
         </p:nvSpPr>
         <p:spPr>
           <a:xfrm>
-            <a:off x="685800" y="5614416"/>
-            <a:ext cx="10820095" cy="731520"/>
+            <a:off x="685800" y="5650992"/>
+            <a:ext cx="10820095" cy="768096"/>
           </a:xfrm>
           <a:prstGeom prst="rect">
             <a:avLst/>
@@ -11583,14 +11880,14 @@
       </p:sp>
       <p:sp>
         <p:nvSpPr>
-          <p:cNvPr id="78" name="Rectangle 77"/>
+          <p:cNvPr id="84" name="Rectangle 83"/>
           <p:cNvSpPr/>
           <p:nvPr/>
         </p:nvSpPr>
         <p:spPr>
           <a:xfrm>
-            <a:off x="685800" y="5614416"/>
-            <a:ext cx="50292" cy="731520"/>
+            <a:off x="685800" y="5650992"/>
+            <a:ext cx="50292" cy="768096"/>
           </a:xfrm>
           <a:prstGeom prst="rect">
             <a:avLst/>
@@ -11625,14 +11922,14 @@
       </p:sp>
       <p:sp>
         <p:nvSpPr>
-          <p:cNvPr id="79" name="TextBox 78"/>
-          <p:cNvSpPr txBox="1"/>
-          <p:nvPr/>
-        </p:nvSpPr>
-        <p:spPr>
-          <a:xfrm>
-            <a:off x="978408" y="5760720"/>
-            <a:ext cx="10253167" cy="512064"/>
+          <p:cNvPr id="85" name="TextBox 84"/>
+          <p:cNvSpPr txBox="1"/>
+          <p:nvPr/>
+        </p:nvSpPr>
+        <p:spPr>
+          <a:xfrm>
+            <a:off x="978408" y="5797296"/>
+            <a:ext cx="10253167" cy="548640"/>
           </a:xfrm>
           <a:prstGeom prst="rect">
             <a:avLst/>
@@ -11657,7 +11954,7 @@
                 </a:solidFill>
                 <a:latin typeface="Segoe UI"/>
               </a:rPr>
-              <a:t>Six of these ten can never be recovered from a data file.</a:t>
+              <a:t>Eight of these eleven can never be recovered from a data file.</a:t>
             </a:r>
           </a:p>
           <a:p>
@@ -11673,14 +11970,14 @@
                 </a:solidFill>
                 <a:latin typeface="Segoe UI"/>
               </a:rPr>
-              <a:t>They exist only in the vendor's specification. Where the dictionary is missing them, the agent leaves the cell blank and raises a named question — it will not write a description it inferred.</a:t>
+              <a:t>They exist only in the vendor's specification. Where the dictionary is missing them the agent leaves the cell blank and raises a named question — it will not write a description, a null rule or a key it inferred.</a:t>
             </a:r>
           </a:p>
         </p:txBody>
       </p:sp>
       <p:cxnSp>
         <p:nvCxnSpPr>
-          <p:cNvPr id="80" name="Connector 79"/>
+          <p:cNvPr id="86" name="Connector 85"/>
           <p:cNvCxnSpPr/>
           <p:nvPr/>
         </p:nvCxnSpPr>
@@ -11715,7 +12012,7 @@
       </p:cxnSp>
       <p:sp>
         <p:nvSpPr>
-          <p:cNvPr id="81" name="TextBox 80"/>
+          <p:cNvPr id="87" name="TextBox 86"/>
           <p:cNvSpPr txBox="1"/>
           <p:nvPr/>
         </p:nvSpPr>
@@ -11743,14 +12040,14 @@
                 </a:solidFill>
                 <a:latin typeface="Segoe UI"/>
               </a:rPr>
-              <a:t>templates/DICT_TEMPLATE — issue it to the vendor as-is; src/frdsttm/dictionary.py parses it</a:t>
-            </a:r>
-          </a:p>
-        </p:txBody>
-      </p:sp>
-      <p:sp>
-        <p:nvSpPr>
-          <p:cNvPr id="82" name="TextBox 81"/>
+              <a:t>templates/DICT_TEMPLATE_v1.3.xlsx — issue it to the vendor as-is; src/frdsttm/dictionary.py parses what comes back</a:t>
+            </a:r>
+          </a:p>
+        </p:txBody>
+      </p:sp>
+      <p:sp>
+        <p:nvSpPr>
+          <p:cNvPr id="88" name="TextBox 87"/>
           <p:cNvSpPr txBox="1"/>
           <p:nvPr/>
         </p:nvSpPr>

--- a/context/FRD-and-Dictionary-Input-Requirements.pptx
+++ b/context/FRD-and-Dictionary-Input-Requirements.pptx
@@ -550,7 +550,7 @@
           </a:p>
           <a:p>
             <a:r>
-              <a:t>feed-level frame and raises one gated question naming the file whose columns it</a:t>
+              <a:t>source-level frame and raises one gated question naming the file whose columns it</a:t>
             </a:r>
           </a:p>
           <a:p>
@@ -852,7 +852,7 @@
           </a:p>
           <a:p>
             <a:r>
-              <a:t>The worked case: one real feed is a headerless, pipe-delimited file carrying three</a:t>
+              <a:t>The worked case: one real source is a headerless, pipe-delimited file carrying three</a:t>
             </a:r>
           </a:p>
           <a:p>
@@ -904,7 +904,7 @@
           </a:p>
           <a:p>
             <a:r>
-              <a:t>supplies. The agent decides from the FRD ALONE whether a feed renames: if the</a:t>
+              <a:t>supplies. The agent decides from the FRD ALONE whether a source renames: if the</a:t>
             </a:r>
           </a:p>
           <a:p>
@@ -914,13 +914,13 @@
           </a:p>
           <a:p>
             <a:r>
-              <a:t>on both real feeds (CAQH renames 115/115, SD 4/411).</a:t>
+              <a:t>on both real sources (CAQH renames 115/115, SD 4/411).</a:t>
             </a:r>
           </a:p>
           <a:p/>
           <a:p>
             <a:r>
-              <a:t>What the reviewer then receives, on the renaming feed: 22 of 115 exact, 63 more</a:t>
+              <a:t>What the reviewer then receives, on the renaming source: 22 of 115 exact, 63 more</a:t>
             </a:r>
           </a:p>
           <a:p>
@@ -945,7 +945,7 @@
           </a:p>
           <a:p>
             <a:r>
-              <a:t>workbook. On a feed that does not rename, the agent is at 388/391.</a:t>
+              <a:t>workbook. On a source that does not rename, the agent is at 388/391.</a:t>
             </a:r>
           </a:p>
           <a:p/>
@@ -4419,7 +4419,7 @@
                 </a:solidFill>
                 <a:latin typeface="Segoe UI"/>
               </a:rPr>
-              <a:t>the feed-level frame</a:t>
+              <a:t>the source-level frame</a:t>
             </a:r>
           </a:p>
         </p:txBody>
@@ -5857,7 +5857,7 @@
                 </a:solidFill>
                 <a:latin typeface="Segoe UI"/>
               </a:rPr>
-              <a:t> — the warehouse's own column vocabulary, harvested from approved STTMs when they sync. Nobody attaches either to a feed, and </a:t>
+              <a:t> — the warehouse's own column vocabulary, harvested from approved STTMs when they sync. Nobody attaches either to a source, and </a:t>
             </a:r>
             <a:r>
               <a:rPr sz="1000" b="1">
@@ -6042,7 +6042,7 @@
                 </a:solidFill>
                 <a:latin typeface="Consolas"/>
               </a:rPr>
-              <a:t>VDD_&lt;feed&gt;.xlsx</a:t>
+              <a:t>VDD_&lt;source&gt;.xlsx</a:t>
             </a:r>
             <a:r>
               <a:rPr sz="1100" b="0">
@@ -6060,7 +6060,7 @@
                 </a:solidFill>
                 <a:latin typeface="Consolas"/>
               </a:rPr>
-              <a:t>FRD_&lt;feed&gt;.docx</a:t>
+              <a:t>FRD_&lt;source&gt;.docx</a:t>
             </a:r>
             <a:r>
               <a:rPr sz="1100" b="0">
@@ -7753,7 +7753,7 @@
                 </a:solidFill>
                 <a:latin typeface="Segoe UI"/>
               </a:rPr>
-              <a:t>Out of scope for an ingest feed</a:t>
+              <a:t>Out of scope for an ingest source</a:t>
             </a:r>
           </a:p>
         </p:txBody>
@@ -8185,7 +8185,7 @@
                 </a:solidFill>
                 <a:latin typeface="Consolas"/>
               </a:rPr>
-              <a:t>Name the VDD_&lt;feed&gt;.xlsx here</a:t>
+              <a:t>Name the VDD_&lt;source&gt;.xlsx here</a:t>
             </a:r>
           </a:p>
         </p:txBody>
@@ -8987,7 +8987,7 @@
                 </a:solidFill>
                 <a:latin typeface="Segoe UI"/>
               </a:rPr>
-              <a:t>One Excel workbook per feed, two kinds of sheet. Nothing in it is an ACFC decision — every cell is something the vendor already knows about its own file.</a:t>
+              <a:t>One Excel workbook per source, two kinds of sheet. Nothing in it is an ACFC decision — every cell is something the vendor already knows about its own file.</a:t>
             </a:r>
           </a:p>
         </p:txBody>
@@ -9288,7 +9288,7 @@
                 </a:solidFill>
                 <a:latin typeface="Segoe UI"/>
               </a:rPr>
-              <a:t>matches a delivered file to this feed</a:t>
+              <a:t>matches a delivered file to this source</a:t>
             </a:r>
           </a:p>
         </p:txBody>
@@ -12040,7 +12040,7 @@
                 </a:solidFill>
                 <a:latin typeface="Segoe UI"/>
               </a:rPr>
-              <a:t>templates/DICT_TEMPLATE_v1.3.xlsx — issue it to the vendor as-is; src/frdsttm/dictionary.py parses what comes back</a:t>
+              <a:t>templates/DICT_TEMPLATE.xlsx — issue it to the vendor as-is; src/frdsttm/dictionary.py parses what comes back</a:t>
             </a:r>
           </a:p>
         </p:txBody>
